--- a/media/exports/reports/2026-04/calls.pptx
+++ b/media/exports/reports/2026-04/calls.pptx
@@ -235,25 +235,25 @@
                 <c:formatCode>#,##0;[Red](#,##0)</c:formatCode>
                 <c:ptCount val="7"/>
                 <c:pt idx="0">
-                  <c:v>84</c:v>
+                  <c:v>73</c:v>
                 </c:pt>
                 <c:pt idx="1">
-                  <c:v>165</c:v>
+                  <c:v>142</c:v>
                 </c:pt>
                 <c:pt idx="2">
-                  <c:v>122</c:v>
+                  <c:v>128</c:v>
                 </c:pt>
                 <c:pt idx="3">
-                  <c:v>82</c:v>
+                  <c:v>83</c:v>
                 </c:pt>
                 <c:pt idx="4">
-                  <c:v>108</c:v>
+                  <c:v>113</c:v>
                 </c:pt>
                 <c:pt idx="5">
-                  <c:v>75</c:v>
+                  <c:v>87</c:v>
                 </c:pt>
                 <c:pt idx="6">
-                  <c:v>115</c:v>
+                  <c:v>105</c:v>
                 </c:pt>
               </c:numCache>
             </c:numRef>
@@ -317,7 +317,7 @@
       <c:valAx>
         <c:axId val="-2113994440"/>
         <c:scaling>
-          <c:max val="189.74999999999997"/>
+          <c:max val="163.29999999999998"/>
           <c:min val="0.0"/>
         </c:scaling>
         <c:delete/>
@@ -468,61 +468,61 @@
                 <c:formatCode>#,##0;[Red](#,##0)</c:formatCode>
                 <c:ptCount val="19"/>
                 <c:pt idx="0">
-                  <c:v>659</c:v>
+                  <c:v>685</c:v>
                 </c:pt>
                 <c:pt idx="1">
-                  <c:v>655</c:v>
+                  <c:v>633</c:v>
                 </c:pt>
                 <c:pt idx="2">
+                  <c:v>684</c:v>
+                </c:pt>
+                <c:pt idx="3">
+                  <c:v>690</c:v>
+                </c:pt>
+                <c:pt idx="4">
+                  <c:v>664</c:v>
+                </c:pt>
+                <c:pt idx="5">
                   <c:v>685</c:v>
                 </c:pt>
-                <c:pt idx="3">
-                  <c:v>714</c:v>
-                </c:pt>
-                <c:pt idx="4">
-                  <c:v>683</c:v>
-                </c:pt>
-                <c:pt idx="5">
-                  <c:v>725</c:v>
-                </c:pt>
                 <c:pt idx="6">
-                  <c:v>620</c:v>
+                  <c:v>629</c:v>
                 </c:pt>
                 <c:pt idx="7">
-                  <c:v>754</c:v>
+                  <c:v>724</c:v>
                 </c:pt>
                 <c:pt idx="8">
-                  <c:v>783</c:v>
+                  <c:v>820</c:v>
                 </c:pt>
                 <c:pt idx="9">
-                  <c:v>871</c:v>
+                  <c:v>909</c:v>
                 </c:pt>
                 <c:pt idx="10">
-                  <c:v>852</c:v>
+                  <c:v>826</c:v>
                 </c:pt>
                 <c:pt idx="11">
-                  <c:v>781</c:v>
+                  <c:v>756</c:v>
                 </c:pt>
                 <c:pt idx="12">
-                  <c:v>792</c:v>
+                  <c:v>770</c:v>
                 </c:pt>
                 <c:pt idx="13">
-                  <c:v>675</c:v>
+                  <c:v>746</c:v>
                 </c:pt>
                 <c:pt idx="14">
-                  <c:v>725</c:v>
+                  <c:v>776</c:v>
                 </c:pt>
                 <c:pt idx="15">
-                  <c:v>756</c:v>
+                  <c:v>726</c:v>
                 </c:pt>
                 <c:pt idx="16">
-                  <c:v>763</c:v>
+                  <c:v>678</c:v>
                 </c:pt>
                 <c:pt idx="17">
-                  <c:v>774</c:v>
+                  <c:v>865</c:v>
                 </c:pt>
                 <c:pt idx="18">
-                  <c:v>751</c:v>
+                  <c:v>731</c:v>
                 </c:pt>
               </c:numCache>
             </c:numRef>
@@ -1096,7 +1096,7 @@
           <a:lstStyle/>
           <a:p>
             <a:r>
-              <a:t>When do calls for help come in, and are we there to answer?. Calls for help, April: 751; Answered while staffed, April: 82.9%; Calls outside staffed hours, April: 55.5%; Median wait when answered, April: 79 sec. 751 calls for help came in during April. While the line was staffed, 82.9% were answered (target 90.0%); 55.5% of all calls came outside staffed hours and went to voicemail. The busiest time was 5 to 8pm (165 calls). 165 calls came between 5 and 8pm, when no-one is on the line. 57 callers hung up waiting while the line was staffed.</a:t>
+              <a:t>When do calls for help come in, and are we there to answer?. Calls for help, April: 731; Answered while staffed, April: 82.6%; Calls outside staffed hours, April: 51.3%; Median wait when answered, April: 80 sec. 731 calls for help came in during April. While the line was staffed, 82.6% were answered (target 90.0%); 51.3% of all calls came outside staffed hours and went to voicemail. The busiest time was 5 to 8pm (142 calls). 142 calls came between 5 and 8pm, when no-one is on the line. 62 callers hung up waiting while the line was staffed.</a:t>
             </a:r>
           </a:p>
         </p:txBody>
@@ -4581,7 +4581,7 @@
                 </a:solidFill>
                 <a:latin typeface="Roboto"/>
               </a:rPr>
-              <a:t>Data retrieved 2pm, Tue 6 Oct 2026 · Generated 8 Oct 2026, 6:42pm · Sample data · Made with Python (python-pptx)</a:t>
+              <a:t>Data retrieved 2pm, Tue 6 Oct 2026 · Generated 8 Oct 2026, 11:41pm · Sample data · Made with Python (python-pptx)</a:t>
             </a:r>
           </a:p>
         </p:txBody>
@@ -4927,7 +4927,7 @@
                 </a:solidFill>
                 <a:latin typeface="Roboto"/>
               </a:rPr>
-              <a:t>751</a:t>
+              <a:t>731</a:t>
             </a:r>
           </a:p>
         </p:txBody>
@@ -4966,7 +4966,7 @@
                 </a:solidFill>
                 <a:latin typeface="Roboto"/>
               </a:rPr>
-              <a:t>March 774</a:t>
+              <a:t>March 865</a:t>
             </a:r>
           </a:p>
         </p:txBody>
@@ -5093,7 +5093,7 @@
                 </a:solidFill>
                 <a:latin typeface="Roboto"/>
               </a:rPr>
-              <a:t>82.9%</a:t>
+              <a:t>82.6%</a:t>
             </a:r>
           </a:p>
         </p:txBody>
@@ -5259,7 +5259,7 @@
                 </a:solidFill>
                 <a:latin typeface="Roboto"/>
               </a:rPr>
-              <a:t>55.5%</a:t>
+              <a:t>51.3%</a:t>
             </a:r>
           </a:p>
         </p:txBody>
@@ -5298,7 +5298,7 @@
                 </a:solidFill>
                 <a:latin typeface="Roboto"/>
               </a:rPr>
-              <a:t>417 calls to voicemail</a:t>
+              <a:t>375 calls to voicemail</a:t>
             </a:r>
           </a:p>
         </p:txBody>
@@ -5425,7 +5425,7 @@
                 </a:solidFill>
                 <a:latin typeface="Roboto"/>
               </a:rPr>
-              <a:t>79 sec</a:t>
+              <a:t>80 sec</a:t>
             </a:r>
           </a:p>
         </p:txBody>
@@ -5464,7 +5464,7 @@
                 </a:solidFill>
                 <a:latin typeface="Roboto"/>
               </a:rPr>
-              <a:t>277 answered calls</a:t>
+              <a:t>294 answered calls</a:t>
             </a:r>
           </a:p>
         </p:txBody>
@@ -5609,7 +5609,7 @@
                 </a:solidFill>
                 <a:latin typeface="Roboto"/>
               </a:rPr>
-              <a:t>751 calls for help came in during April. While the line was staffed, 82.9% were answered (target 90.0%); 55.5% of all calls came outside staffed hours and went to voicemail. The busiest time was 5 to 8pm (165 calls).</a:t>
+              <a:t>731 calls for help came in during April. While the line was staffed, 82.6% were answered (target 90.0%); 51.3% of all calls came outside staffed hours and went to voicemail. The busiest time was 5 to 8pm (142 calls).</a:t>
             </a:r>
           </a:p>
         </p:txBody>
@@ -5736,7 +5736,7 @@
                 </a:solidFill>
                 <a:latin typeface="Roboto"/>
               </a:rPr>
-              <a:t>165 calls came between 5 and 8pm, when no-one is on the line. 57 callers hung up waiting while the line was staffed.</a:t>
+              <a:t>142 calls came between 5 and 8pm, when no-one is on the line. 62 callers hung up waiting while the line was staffed.</a:t>
             </a:r>
           </a:p>
         </p:txBody>
@@ -5814,7 +5814,7 @@
                 </a:solidFill>
                 <a:latin typeface="Roboto"/>
               </a:rPr>
-              <a:t>Data retrieved 2pm, Tue 6 Oct 2026 · Generated 8 Oct 2026, 6:42pm · Sample data · Made with Python (python-pptx)</a:t>
+              <a:t>Data retrieved 2pm, Tue 6 Oct 2026 · Generated 8 Oct 2026, 11:41pm · Sample data · Made with Python (python-pptx)</a:t>
             </a:r>
           </a:p>
         </p:txBody>
@@ -6129,7 +6129,7 @@
                 </a:solidFill>
                 <a:latin typeface="Roboto"/>
               </a:rPr>
-              <a:t>Data retrieved 2pm, Tue 6 Oct 2026 · Generated 8 Oct 2026, 6:42pm · Sample data · Made with Python (python-pptx)</a:t>
+              <a:t>Data retrieved 2pm, Tue 6 Oct 2026 · Generated 8 Oct 2026, 11:41pm · Sample data · Made with Python (python-pptx)</a:t>
             </a:r>
           </a:p>
         </p:txBody>

--- a/media/exports/reports/2026-04/calls.pptx
+++ b/media/exports/reports/2026-04/calls.pptx
@@ -1026,7 +1026,7 @@
           <a:lstStyle/>
           <a:p>
             <a:r>
-              <a:t>When do calls for help come in, and are we there to answer?. Sample Community Services Ltd. Period: April 2026. Every call to the help line: when it came in, whether someone answered, and how long the caller waited. The line is staffed 8:30am to 5pm on working days.</a:t>
+              <a:t>When do calls for help come in, and are we there to answer?. Sample Community Services Ltd. Period: April 2026. In short: 731 calls in April: 82.6% answered while staffed (target 90.0%); 51.3% came outside staffed hours. Every call to the help line: when it came in, whether someone answered, and how long the caller waited. The line is staffed 8:30am to 5pm on working days.</a:t>
             </a:r>
           </a:p>
         </p:txBody>
@@ -4391,7 +4391,7 @@
         <p:spPr>
           <a:xfrm>
             <a:off x="457200" y="3703320"/>
-            <a:ext cx="11277295" cy="535940"/>
+            <a:ext cx="11277295" cy="758190"/>
           </a:xfrm>
           <a:prstGeom prst="rect">
             <a:avLst/>
@@ -4416,7 +4416,7 @@
                 </a:solidFill>
                 <a:latin typeface="Roboto"/>
               </a:rPr>
-              <a:t>Period: April 2026. Every call to the help line: when it came in, whether someone answered, and how long the caller waited. The line is staffed 8:30am to 5pm on working days.</a:t>
+              <a:t>Period: April 2026. In short: 731 calls in April: 82.6% answered while staffed (target 90.0%); 51.3% came outside staffed hours. Every call to the help line: when it came in, whether someone answered, and how long the caller waited. The line is staffed 8:30am to 5pm on working days.</a:t>
             </a:r>
           </a:p>
         </p:txBody>
@@ -4429,7 +4429,7 @@
         </p:nvSpPr>
         <p:spPr>
           <a:xfrm>
-            <a:off x="457200" y="4330700"/>
+            <a:off x="457200" y="4552950"/>
             <a:ext cx="11277295" cy="1097280"/>
           </a:xfrm>
           <a:prstGeom prst="rect">
@@ -4581,7 +4581,7 @@
                 </a:solidFill>
                 <a:latin typeface="Roboto"/>
               </a:rPr>
-              <a:t>Data retrieved 2pm, Tue 6 Oct 2026 · Generated 8 Oct 2026, 11:41pm · Sample data · Made with Python (python-pptx)</a:t>
+              <a:t>Data retrieved 2pm, Tue 6 Oct 2026 · Generated 10 Oct 2026, 9:55pm · Sample data · Made with Python (python-pptx)</a:t>
             </a:r>
           </a:p>
         </p:txBody>
@@ -5814,7 +5814,7 @@
                 </a:solidFill>
                 <a:latin typeface="Roboto"/>
               </a:rPr>
-              <a:t>Data retrieved 2pm, Tue 6 Oct 2026 · Generated 8 Oct 2026, 11:41pm · Sample data · Made with Python (python-pptx)</a:t>
+              <a:t>Data retrieved 2pm, Tue 6 Oct 2026 · Generated 10 Oct 2026, 9:55pm · Sample data · Made with Python (python-pptx)</a:t>
             </a:r>
           </a:p>
         </p:txBody>
@@ -6129,7 +6129,7 @@
                 </a:solidFill>
                 <a:latin typeface="Roboto"/>
               </a:rPr>
-              <a:t>Data retrieved 2pm, Tue 6 Oct 2026 · Generated 8 Oct 2026, 11:41pm · Sample data · Made with Python (python-pptx)</a:t>
+              <a:t>Data retrieved 2pm, Tue 6 Oct 2026 · Generated 10 Oct 2026, 9:55pm · Sample data · Made with Python (python-pptx)</a:t>
             </a:r>
           </a:p>
         </p:txBody>
